--- a/assets/powerpoints/module-vetements/D2-la-mise-de-cote.pptx
+++ b/assets/powerpoints/module-vetements/D2-la-mise-de-cote.pptx
@@ -11672,7 +11672,25 @@
                 </a:solidFill>
                 <a:latin typeface="Verdana"/>
               </a:rPr>
-              <a:t>« Je veux échanger » se comprend, mais sonne comme un ordre. « Je &lt;b&gt;voudrais&lt;/b&gt; échanger » est la forme normale au comptoir. De même : « Auriez-vous la taille au-dessus ? », « Est-ce que je pourrais le mettre de côté ? ». Ces trois formes se retiennent en bloc.</a:t>
+              <a:t>« Je veux échanger » se comprend, mais sonne comme un ordre. « Je </a:t>
+            </a:r>
+            <a:r>
+              <a:rPr sz="2000" b="1" i="0">
+                <a:solidFill>
+                  <a:srgbClr val="4B4F52"/>
+                </a:solidFill>
+                <a:latin typeface="Verdana"/>
+              </a:rPr>
+              <a:t>voudrais</a:t>
+            </a:r>
+            <a:r>
+              <a:rPr sz="2000" b="0" i="0">
+                <a:solidFill>
+                  <a:srgbClr val="4B4F52"/>
+                </a:solidFill>
+                <a:latin typeface="Verdana"/>
+              </a:rPr>
+              <a:t> échanger » est la forme normale au comptoir. De même : « Auriez-vous la taille au-dessus ? », « Est-ce que je pourrais le mettre de côté ? ». Ces trois formes se retiennent en bloc.</a:t>
             </a:r>
           </a:p>
         </p:txBody>
